--- a/downloads/module-2-slides.pptx
+++ b/downloads/module-2-slides.pptx
@@ -1130,6 +1130,10 @@
             <a:prstDash val="solid"/>
           </a:ln>
         </p:spPr>
+        <p:txBody>
+          <a:bodyPr/>
+          <a:p/>
+        </p:txBody>
       </p:sp>
       <p:sp>
         <p:nvSpPr>
@@ -1482,6 +1486,10 @@
             <a:prstDash val="solid"/>
           </a:ln>
         </p:spPr>
+        <p:txBody>
+          <a:bodyPr/>
+          <a:p/>
+        </p:txBody>
       </p:sp>
       <p:sp>
         <p:nvSpPr>
@@ -1589,6 +1597,10 @@
             <a:prstDash val="solid"/>
           </a:ln>
         </p:spPr>
+        <p:txBody>
+          <a:bodyPr/>
+          <a:p/>
+        </p:txBody>
       </p:sp>
       <p:sp>
         <p:nvSpPr>
@@ -1655,6 +1667,10 @@
             <a:prstDash val="solid"/>
           </a:ln>
         </p:spPr>
+        <p:txBody>
+          <a:bodyPr/>
+          <a:p/>
+        </p:txBody>
       </p:sp>
       <p:sp>
         <p:nvSpPr>
@@ -1762,6 +1778,10 @@
             <a:prstDash val="solid"/>
           </a:ln>
         </p:spPr>
+        <p:txBody>
+          <a:bodyPr/>
+          <a:p/>
+        </p:txBody>
       </p:sp>
       <p:sp>
         <p:nvSpPr>
@@ -1828,6 +1848,10 @@
             <a:prstDash val="solid"/>
           </a:ln>
         </p:spPr>
+        <p:txBody>
+          <a:bodyPr/>
+          <a:p/>
+        </p:txBody>
       </p:sp>
       <p:sp>
         <p:nvSpPr>
@@ -1935,6 +1959,10 @@
             <a:prstDash val="solid"/>
           </a:ln>
         </p:spPr>
+        <p:txBody>
+          <a:bodyPr/>
+          <a:p/>
+        </p:txBody>
       </p:sp>
       <p:sp>
         <p:nvSpPr>
@@ -2001,6 +2029,10 @@
             <a:prstDash val="solid"/>
           </a:ln>
         </p:spPr>
+        <p:txBody>
+          <a:bodyPr/>
+          <a:p/>
+        </p:txBody>
       </p:sp>
       <p:sp>
         <p:nvSpPr>
@@ -2222,6 +2254,10 @@
             <a:prstDash val="solid"/>
           </a:ln>
         </p:spPr>
+        <p:txBody>
+          <a:bodyPr/>
+          <a:p/>
+        </p:txBody>
       </p:sp>
       <p:sp>
         <p:nvSpPr>
@@ -2288,6 +2324,10 @@
             <a:prstDash val="solid"/>
           </a:ln>
         </p:spPr>
+        <p:txBody>
+          <a:bodyPr/>
+          <a:p/>
+        </p:txBody>
       </p:sp>
       <p:sp>
         <p:nvSpPr>
@@ -2354,6 +2394,10 @@
             <a:prstDash val="solid"/>
           </a:ln>
         </p:spPr>
+        <p:txBody>
+          <a:bodyPr/>
+          <a:p/>
+        </p:txBody>
       </p:sp>
       <p:sp>
         <p:nvSpPr>
@@ -2420,6 +2464,10 @@
             <a:prstDash val="solid"/>
           </a:ln>
         </p:spPr>
+        <p:txBody>
+          <a:bodyPr/>
+          <a:p/>
+        </p:txBody>
       </p:sp>
       <p:sp>
         <p:nvSpPr>
@@ -2445,6 +2493,10 @@
             <a:prstDash val="solid"/>
           </a:ln>
         </p:spPr>
+        <p:txBody>
+          <a:bodyPr/>
+          <a:p/>
+        </p:txBody>
       </p:sp>
       <p:sp>
         <p:nvSpPr>
@@ -2714,14 +2766,14 @@
       </p:sp>
       <p:sp>
         <p:nvSpPr>
-          <p:cNvPr id="5" name="Shape 2"/>
+          <p:cNvPr id="27" name="Shape 2"/>
           <p:cNvSpPr/>
           <p:nvPr/>
         </p:nvSpPr>
         <p:spPr>
           <a:xfrm>
-            <a:off x="822960" y="2194560"/>
-            <a:ext cx="914400" cy="914400"/>
+            <a:off x="822960" y="2011680"/>
+            <a:ext cx="822960" cy="822960"/>
           </a:xfrm>
           <a:prstGeom prst="ellipse">
             <a:avLst/>
@@ -2739,14 +2791,14 @@
       </p:sp>
       <p:sp>
         <p:nvSpPr>
-          <p:cNvPr id="6" name="Text 3"/>
-          <p:cNvSpPr txBox="1"/>
-          <p:nvPr/>
-        </p:nvSpPr>
-        <p:spPr>
-          <a:xfrm>
-            <a:off x="822960" y="2194560"/>
-            <a:ext cx="914400" cy="914400"/>
+          <p:cNvPr id="28" name="Text 3"/>
+          <p:cNvSpPr txBox="1"/>
+          <p:nvPr/>
+        </p:nvSpPr>
+        <p:spPr>
+          <a:xfrm>
+            <a:off x="822960" y="2011680"/>
+            <a:ext cx="822960" cy="822960"/>
           </a:xfrm>
           <a:prstGeom prst="rect">
             <a:avLst/>
@@ -2762,7 +2814,7 @@
               <a:buNone/>
             </a:pPr>
             <a:r>
-              <a:rPr lang="en-US" sz="3000" b="1" dirty="0">
+              <a:rPr lang="en-US" sz="2800" b="1" dirty="0">
                 <a:solidFill>
                   <a:srgbClr val="3B1217"/>
                 </a:solidFill>
@@ -2778,23 +2830,23 @@
       </p:sp>
       <p:sp>
         <p:nvSpPr>
-          <p:cNvPr id="7" name="Text 4"/>
-          <p:cNvSpPr txBox="1"/>
-          <p:nvPr/>
-        </p:nvSpPr>
-        <p:spPr>
-          <a:xfrm>
-            <a:off x="548640" y="3291840"/>
-            <a:ext cx="1463040" cy="822960"/>
-          </a:xfrm>
-          <a:prstGeom prst="rect">
-            <a:avLst/>
-          </a:prstGeom>
-          <a:noFill/>
-          <a:ln/>
-        </p:spPr>
-        <p:txBody>
-          <a:bodyPr wrap="square" lIns="0" tIns="0" rIns="0" bIns="0" rtlCol="0" anchor="ctr"/>
+          <p:cNvPr id="29" name="Text 4"/>
+          <p:cNvSpPr txBox="1"/>
+          <p:nvPr/>
+        </p:nvSpPr>
+        <p:spPr>
+          <a:xfrm>
+            <a:off x="576072" y="2971800"/>
+            <a:ext cx="1316736" cy="1371600"/>
+          </a:xfrm>
+          <a:prstGeom prst="rect">
+            <a:avLst/>
+          </a:prstGeom>
+          <a:noFill/>
+          <a:ln/>
+        </p:spPr>
+        <p:txBody>
+          <a:bodyPr wrap="square" lIns="0" tIns="0" rIns="0" bIns="0" rtlCol="0" anchor="t"/>
           <a:lstStyle/>
           <a:p>
             <a:pPr algn="ctr" indent="0" marL="0">
@@ -2809,7 +2861,7 @@
                 <a:ea typeface="Calibri" pitchFamily="34" charset="-122"/>
                 <a:cs typeface="Calibri" pitchFamily="34" charset="-120"/>
               </a:rPr>
-              <a:t>Try it</a:t>
+              <a:t>Mission brief</a:t>
             </a:r>
             <a:endParaRPr lang="en-US" sz="1600" dirty="0"/>
           </a:p>
@@ -2817,14 +2869,14 @@
       </p:sp>
       <p:sp>
         <p:nvSpPr>
-          <p:cNvPr id="8" name="Shape 5"/>
+          <p:cNvPr id="30" name="Shape 2"/>
           <p:cNvSpPr/>
           <p:nvPr/>
         </p:nvSpPr>
         <p:spPr>
           <a:xfrm>
-            <a:off x="2423160" y="2194560"/>
-            <a:ext cx="914400" cy="914400"/>
+            <a:off x="2194560" y="2011680"/>
+            <a:ext cx="822960" cy="822960"/>
           </a:xfrm>
           <a:prstGeom prst="ellipse">
             <a:avLst/>
@@ -2842,14 +2894,14 @@
       </p:sp>
       <p:sp>
         <p:nvSpPr>
-          <p:cNvPr id="9" name="Text 6"/>
-          <p:cNvSpPr txBox="1"/>
-          <p:nvPr/>
-        </p:nvSpPr>
-        <p:spPr>
-          <a:xfrm>
-            <a:off x="2423160" y="2194560"/>
-            <a:ext cx="914400" cy="914400"/>
+          <p:cNvPr id="31" name="Text 3"/>
+          <p:cNvSpPr txBox="1"/>
+          <p:nvPr/>
+        </p:nvSpPr>
+        <p:spPr>
+          <a:xfrm>
+            <a:off x="2194560" y="2011680"/>
+            <a:ext cx="822960" cy="822960"/>
           </a:xfrm>
           <a:prstGeom prst="rect">
             <a:avLst/>
@@ -2865,7 +2917,7 @@
               <a:buNone/>
             </a:pPr>
             <a:r>
-              <a:rPr lang="en-US" sz="3000" b="1" dirty="0">
+              <a:rPr lang="en-US" sz="2800" b="1" dirty="0">
                 <a:solidFill>
                   <a:srgbClr val="3B1217"/>
                 </a:solidFill>
@@ -2881,23 +2933,23 @@
       </p:sp>
       <p:sp>
         <p:nvSpPr>
-          <p:cNvPr id="10" name="Text 7"/>
-          <p:cNvSpPr txBox="1"/>
-          <p:nvPr/>
-        </p:nvSpPr>
-        <p:spPr>
-          <a:xfrm>
-            <a:off x="2148840" y="3291840"/>
-            <a:ext cx="1463040" cy="822960"/>
-          </a:xfrm>
-          <a:prstGeom prst="rect">
-            <a:avLst/>
-          </a:prstGeom>
-          <a:noFill/>
-          <a:ln/>
-        </p:spPr>
-        <p:txBody>
-          <a:bodyPr wrap="square" lIns="0" tIns="0" rIns="0" bIns="0" rtlCol="0" anchor="ctr"/>
+          <p:cNvPr id="32" name="Text 4"/>
+          <p:cNvSpPr txBox="1"/>
+          <p:nvPr/>
+        </p:nvSpPr>
+        <p:spPr>
+          <a:xfrm>
+            <a:off x="1947672" y="2971800"/>
+            <a:ext cx="1316736" cy="1371600"/>
+          </a:xfrm>
+          <a:prstGeom prst="rect">
+            <a:avLst/>
+          </a:prstGeom>
+          <a:noFill/>
+          <a:ln/>
+        </p:spPr>
+        <p:txBody>
+          <a:bodyPr wrap="square" lIns="0" tIns="0" rIns="0" bIns="0" rtlCol="0" anchor="t"/>
           <a:lstStyle/>
           <a:p>
             <a:pPr algn="ctr" indent="0" marL="0">
@@ -2912,7 +2964,7 @@
                 <a:ea typeface="Calibri" pitchFamily="34" charset="-122"/>
                 <a:cs typeface="Calibri" pitchFamily="34" charset="-120"/>
               </a:rPr>
-              <a:t>Learn</a:t>
+              <a:t>Try it first</a:t>
             </a:r>
             <a:endParaRPr lang="en-US" sz="1600" dirty="0"/>
           </a:p>
@@ -2920,14 +2972,14 @@
       </p:sp>
       <p:sp>
         <p:nvSpPr>
-          <p:cNvPr id="11" name="Shape 8"/>
+          <p:cNvPr id="33" name="Shape 2"/>
           <p:cNvSpPr/>
           <p:nvPr/>
         </p:nvSpPr>
         <p:spPr>
           <a:xfrm>
-            <a:off x="4023360" y="2194560"/>
-            <a:ext cx="914400" cy="914400"/>
+            <a:off x="3566159" y="2011680"/>
+            <a:ext cx="822960" cy="822960"/>
           </a:xfrm>
           <a:prstGeom prst="ellipse">
             <a:avLst/>
@@ -2945,14 +2997,14 @@
       </p:sp>
       <p:sp>
         <p:nvSpPr>
-          <p:cNvPr id="12" name="Text 9"/>
-          <p:cNvSpPr txBox="1"/>
-          <p:nvPr/>
-        </p:nvSpPr>
-        <p:spPr>
-          <a:xfrm>
-            <a:off x="4023360" y="2194560"/>
-            <a:ext cx="914400" cy="914400"/>
+          <p:cNvPr id="34" name="Text 3"/>
+          <p:cNvSpPr txBox="1"/>
+          <p:nvPr/>
+        </p:nvSpPr>
+        <p:spPr>
+          <a:xfrm>
+            <a:off x="3566159" y="2011680"/>
+            <a:ext cx="822960" cy="822960"/>
           </a:xfrm>
           <a:prstGeom prst="rect">
             <a:avLst/>
@@ -2968,7 +3020,7 @@
               <a:buNone/>
             </a:pPr>
             <a:r>
-              <a:rPr lang="en-US" sz="3000" b="1" dirty="0">
+              <a:rPr lang="en-US" sz="2800" b="1" dirty="0">
                 <a:solidFill>
                   <a:srgbClr val="3B1217"/>
                 </a:solidFill>
@@ -2984,23 +3036,23 @@
       </p:sp>
       <p:sp>
         <p:nvSpPr>
-          <p:cNvPr id="13" name="Text 10"/>
-          <p:cNvSpPr txBox="1"/>
-          <p:nvPr/>
-        </p:nvSpPr>
-        <p:spPr>
-          <a:xfrm>
-            <a:off x="3749040" y="3291840"/>
-            <a:ext cx="1463040" cy="822960"/>
-          </a:xfrm>
-          <a:prstGeom prst="rect">
-            <a:avLst/>
-          </a:prstGeom>
-          <a:noFill/>
-          <a:ln/>
-        </p:spPr>
-        <p:txBody>
-          <a:bodyPr wrap="square" lIns="0" tIns="0" rIns="0" bIns="0" rtlCol="0" anchor="ctr"/>
+          <p:cNvPr id="35" name="Text 4"/>
+          <p:cNvSpPr txBox="1"/>
+          <p:nvPr/>
+        </p:nvSpPr>
+        <p:spPr>
+          <a:xfrm>
+            <a:off x="3319272" y="2971800"/>
+            <a:ext cx="1316736" cy="1371600"/>
+          </a:xfrm>
+          <a:prstGeom prst="rect">
+            <a:avLst/>
+          </a:prstGeom>
+          <a:noFill/>
+          <a:ln/>
+        </p:spPr>
+        <p:txBody>
+          <a:bodyPr wrap="square" lIns="0" tIns="0" rIns="0" bIns="0" rtlCol="0" anchor="t"/>
           <a:lstStyle/>
           <a:p>
             <a:pPr algn="ctr" indent="0" marL="0">
@@ -3015,7 +3067,7 @@
                 <a:ea typeface="Calibri" pitchFamily="34" charset="-122"/>
                 <a:cs typeface="Calibri" pitchFamily="34" charset="-120"/>
               </a:rPr>
-              <a:t>Ethics</a:t>
+              <a:t>Learn</a:t>
             </a:r>
             <a:endParaRPr lang="en-US" sz="1600" dirty="0"/>
           </a:p>
@@ -3023,14 +3075,14 @@
       </p:sp>
       <p:sp>
         <p:nvSpPr>
-          <p:cNvPr id="14" name="Shape 11"/>
+          <p:cNvPr id="36" name="Shape 2"/>
           <p:cNvSpPr/>
           <p:nvPr/>
         </p:nvSpPr>
         <p:spPr>
           <a:xfrm>
-            <a:off x="5623560" y="2194560"/>
-            <a:ext cx="914400" cy="914400"/>
+            <a:off x="4937759" y="2011680"/>
+            <a:ext cx="822960" cy="822960"/>
           </a:xfrm>
           <a:prstGeom prst="ellipse">
             <a:avLst/>
@@ -3048,14 +3100,14 @@
       </p:sp>
       <p:sp>
         <p:nvSpPr>
-          <p:cNvPr id="15" name="Text 12"/>
-          <p:cNvSpPr txBox="1"/>
-          <p:nvPr/>
-        </p:nvSpPr>
-        <p:spPr>
-          <a:xfrm>
-            <a:off x="5623560" y="2194560"/>
-            <a:ext cx="914400" cy="914400"/>
+          <p:cNvPr id="37" name="Text 3"/>
+          <p:cNvSpPr txBox="1"/>
+          <p:nvPr/>
+        </p:nvSpPr>
+        <p:spPr>
+          <a:xfrm>
+            <a:off x="4937759" y="2011680"/>
+            <a:ext cx="822960" cy="822960"/>
           </a:xfrm>
           <a:prstGeom prst="rect">
             <a:avLst/>
@@ -3071,7 +3123,7 @@
               <a:buNone/>
             </a:pPr>
             <a:r>
-              <a:rPr lang="en-US" sz="3000" b="1" dirty="0">
+              <a:rPr lang="en-US" sz="2800" b="1" dirty="0">
                 <a:solidFill>
                   <a:srgbClr val="3B1217"/>
                 </a:solidFill>
@@ -3087,23 +3139,23 @@
       </p:sp>
       <p:sp>
         <p:nvSpPr>
-          <p:cNvPr id="16" name="Text 13"/>
-          <p:cNvSpPr txBox="1"/>
-          <p:nvPr/>
-        </p:nvSpPr>
-        <p:spPr>
-          <a:xfrm>
-            <a:off x="5349240" y="3291840"/>
-            <a:ext cx="1463040" cy="822960"/>
-          </a:xfrm>
-          <a:prstGeom prst="rect">
-            <a:avLst/>
-          </a:prstGeom>
-          <a:noFill/>
-          <a:ln/>
-        </p:spPr>
-        <p:txBody>
-          <a:bodyPr wrap="square" lIns="0" tIns="0" rIns="0" bIns="0" rtlCol="0" anchor="ctr"/>
+          <p:cNvPr id="38" name="Text 4"/>
+          <p:cNvSpPr txBox="1"/>
+          <p:nvPr/>
+        </p:nvSpPr>
+        <p:spPr>
+          <a:xfrm>
+            <a:off x="4690872" y="2971800"/>
+            <a:ext cx="1316736" cy="1371600"/>
+          </a:xfrm>
+          <a:prstGeom prst="rect">
+            <a:avLst/>
+          </a:prstGeom>
+          <a:noFill/>
+          <a:ln/>
+        </p:spPr>
+        <p:txBody>
+          <a:bodyPr wrap="square" lIns="0" tIns="0" rIns="0" bIns="0" rtlCol="0" anchor="t"/>
           <a:lstStyle/>
           <a:p>
             <a:pPr algn="ctr" indent="0" marL="0">
@@ -3118,7 +3170,7 @@
                 <a:ea typeface="Calibri" pitchFamily="34" charset="-122"/>
                 <a:cs typeface="Calibri" pitchFamily="34" charset="-120"/>
               </a:rPr>
-              <a:t>Attempt + coach</a:t>
+              <a:t>Ethics checkpoint</a:t>
             </a:r>
             <a:endParaRPr lang="en-US" sz="1600" dirty="0"/>
           </a:p>
@@ -3126,14 +3178,14 @@
       </p:sp>
       <p:sp>
         <p:nvSpPr>
-          <p:cNvPr id="17" name="Shape 14"/>
+          <p:cNvPr id="39" name="Shape 2"/>
           <p:cNvSpPr/>
           <p:nvPr/>
         </p:nvSpPr>
         <p:spPr>
           <a:xfrm>
-            <a:off x="7223760" y="2194560"/>
-            <a:ext cx="914400" cy="914400"/>
+            <a:off x="6309359" y="2011680"/>
+            <a:ext cx="822960" cy="822960"/>
           </a:xfrm>
           <a:prstGeom prst="ellipse">
             <a:avLst/>
@@ -3151,14 +3203,14 @@
       </p:sp>
       <p:sp>
         <p:nvSpPr>
-          <p:cNvPr id="18" name="Text 15"/>
-          <p:cNvSpPr txBox="1"/>
-          <p:nvPr/>
-        </p:nvSpPr>
-        <p:spPr>
-          <a:xfrm>
-            <a:off x="7223760" y="2194560"/>
-            <a:ext cx="914400" cy="914400"/>
+          <p:cNvPr id="40" name="Text 3"/>
+          <p:cNvSpPr txBox="1"/>
+          <p:nvPr/>
+        </p:nvSpPr>
+        <p:spPr>
+          <a:xfrm>
+            <a:off x="6309359" y="2011680"/>
+            <a:ext cx="822960" cy="822960"/>
           </a:xfrm>
           <a:prstGeom prst="rect">
             <a:avLst/>
@@ -3174,7 +3226,7 @@
               <a:buNone/>
             </a:pPr>
             <a:r>
-              <a:rPr lang="en-US" sz="3000" b="1" dirty="0">
+              <a:rPr lang="en-US" sz="2800" b="1" dirty="0">
                 <a:solidFill>
                   <a:srgbClr val="3B1217"/>
                 </a:solidFill>
@@ -3190,23 +3242,23 @@
       </p:sp>
       <p:sp>
         <p:nvSpPr>
-          <p:cNvPr id="19" name="Text 16"/>
-          <p:cNvSpPr txBox="1"/>
-          <p:nvPr/>
-        </p:nvSpPr>
-        <p:spPr>
-          <a:xfrm>
-            <a:off x="6949440" y="3291840"/>
-            <a:ext cx="1463040" cy="822960"/>
-          </a:xfrm>
-          <a:prstGeom prst="rect">
-            <a:avLst/>
-          </a:prstGeom>
-          <a:noFill/>
-          <a:ln/>
-        </p:spPr>
-        <p:txBody>
-          <a:bodyPr wrap="square" lIns="0" tIns="0" rIns="0" bIns="0" rtlCol="0" anchor="ctr"/>
+          <p:cNvPr id="41" name="Text 4"/>
+          <p:cNvSpPr txBox="1"/>
+          <p:nvPr/>
+        </p:nvSpPr>
+        <p:spPr>
+          <a:xfrm>
+            <a:off x="6062472" y="2971800"/>
+            <a:ext cx="1316736" cy="1371600"/>
+          </a:xfrm>
+          <a:prstGeom prst="rect">
+            <a:avLst/>
+          </a:prstGeom>
+          <a:noFill/>
+          <a:ln/>
+        </p:spPr>
+        <p:txBody>
+          <a:bodyPr wrap="square" lIns="0" tIns="0" rIns="0" bIns="0" rtlCol="0" anchor="t"/>
           <a:lstStyle/>
           <a:p>
             <a:pPr algn="ctr" indent="0" marL="0">
@@ -3221,7 +3273,7 @@
                 <a:ea typeface="Calibri" pitchFamily="34" charset="-122"/>
                 <a:cs typeface="Calibri" pitchFamily="34" charset="-120"/>
               </a:rPr>
-              <a:t>Mastery</a:t>
+              <a:t>First attempt and coach feedback</a:t>
             </a:r>
             <a:endParaRPr lang="en-US" sz="1600" dirty="0"/>
           </a:p>
@@ -3229,14 +3281,14 @@
       </p:sp>
       <p:sp>
         <p:nvSpPr>
-          <p:cNvPr id="20" name="Shape 17"/>
+          <p:cNvPr id="42" name="Shape 2"/>
           <p:cNvSpPr/>
           <p:nvPr/>
         </p:nvSpPr>
         <p:spPr>
           <a:xfrm>
-            <a:off x="8823960" y="2194560"/>
-            <a:ext cx="914400" cy="914400"/>
+            <a:off x="7680960" y="2011680"/>
+            <a:ext cx="822960" cy="822960"/>
           </a:xfrm>
           <a:prstGeom prst="ellipse">
             <a:avLst/>
@@ -3254,14 +3306,14 @@
       </p:sp>
       <p:sp>
         <p:nvSpPr>
-          <p:cNvPr id="21" name="Text 18"/>
-          <p:cNvSpPr txBox="1"/>
-          <p:nvPr/>
-        </p:nvSpPr>
-        <p:spPr>
-          <a:xfrm>
-            <a:off x="8823960" y="2194560"/>
-            <a:ext cx="914400" cy="914400"/>
+          <p:cNvPr id="43" name="Text 3"/>
+          <p:cNvSpPr txBox="1"/>
+          <p:nvPr/>
+        </p:nvSpPr>
+        <p:spPr>
+          <a:xfrm>
+            <a:off x="7680960" y="2011680"/>
+            <a:ext cx="822960" cy="822960"/>
           </a:xfrm>
           <a:prstGeom prst="rect">
             <a:avLst/>
@@ -3277,7 +3329,7 @@
               <a:buNone/>
             </a:pPr>
             <a:r>
-              <a:rPr lang="en-US" sz="3000" b="1" dirty="0">
+              <a:rPr lang="en-US" sz="2800" b="1" dirty="0">
                 <a:solidFill>
                   <a:srgbClr val="3B1217"/>
                 </a:solidFill>
@@ -3293,23 +3345,23 @@
       </p:sp>
       <p:sp>
         <p:nvSpPr>
-          <p:cNvPr id="22" name="Text 19"/>
-          <p:cNvSpPr txBox="1"/>
-          <p:nvPr/>
-        </p:nvSpPr>
-        <p:spPr>
-          <a:xfrm>
-            <a:off x="8549640" y="3291840"/>
-            <a:ext cx="1463040" cy="822960"/>
-          </a:xfrm>
-          <a:prstGeom prst="rect">
-            <a:avLst/>
-          </a:prstGeom>
-          <a:noFill/>
-          <a:ln/>
-        </p:spPr>
-        <p:txBody>
-          <a:bodyPr wrap="square" lIns="0" tIns="0" rIns="0" bIns="0" rtlCol="0" anchor="ctr"/>
+          <p:cNvPr id="44" name="Text 4"/>
+          <p:cNvSpPr txBox="1"/>
+          <p:nvPr/>
+        </p:nvSpPr>
+        <p:spPr>
+          <a:xfrm>
+            <a:off x="7434071" y="2971800"/>
+            <a:ext cx="1316736" cy="1371600"/>
+          </a:xfrm>
+          <a:prstGeom prst="rect">
+            <a:avLst/>
+          </a:prstGeom>
+          <a:noFill/>
+          <a:ln/>
+        </p:spPr>
+        <p:txBody>
+          <a:bodyPr wrap="square" lIns="0" tIns="0" rIns="0" bIns="0" rtlCol="0" anchor="t"/>
           <a:lstStyle/>
           <a:p>
             <a:pPr algn="ctr" indent="0" marL="0">
@@ -3324,7 +3376,7 @@
                 <a:ea typeface="Calibri" pitchFamily="34" charset="-122"/>
                 <a:cs typeface="Calibri" pitchFamily="34" charset="-120"/>
               </a:rPr>
-              <a:t>Quiz</a:t>
+              <a:t>Mastery attempt</a:t>
             </a:r>
             <a:endParaRPr lang="en-US" sz="1600" dirty="0"/>
           </a:p>
@@ -3332,14 +3384,14 @@
       </p:sp>
       <p:sp>
         <p:nvSpPr>
-          <p:cNvPr id="23" name="Shape 20"/>
+          <p:cNvPr id="45" name="Shape 2"/>
           <p:cNvSpPr/>
           <p:nvPr/>
         </p:nvSpPr>
         <p:spPr>
           <a:xfrm>
-            <a:off x="10424160" y="2194560"/>
-            <a:ext cx="914400" cy="914400"/>
+            <a:off x="9052560" y="2011680"/>
+            <a:ext cx="822960" cy="822960"/>
           </a:xfrm>
           <a:prstGeom prst="ellipse">
             <a:avLst/>
@@ -3357,14 +3409,14 @@
       </p:sp>
       <p:sp>
         <p:nvSpPr>
-          <p:cNvPr id="24" name="Text 21"/>
-          <p:cNvSpPr txBox="1"/>
-          <p:nvPr/>
-        </p:nvSpPr>
-        <p:spPr>
-          <a:xfrm>
-            <a:off x="10424160" y="2194560"/>
-            <a:ext cx="914400" cy="914400"/>
+          <p:cNvPr id="46" name="Text 3"/>
+          <p:cNvSpPr txBox="1"/>
+          <p:nvPr/>
+        </p:nvSpPr>
+        <p:spPr>
+          <a:xfrm>
+            <a:off x="9052560" y="2011680"/>
+            <a:ext cx="822960" cy="822960"/>
           </a:xfrm>
           <a:prstGeom prst="rect">
             <a:avLst/>
@@ -3380,7 +3432,7 @@
               <a:buNone/>
             </a:pPr>
             <a:r>
-              <a:rPr lang="en-US" sz="3000" b="1" dirty="0">
+              <a:rPr lang="en-US" sz="2800" b="1" dirty="0">
                 <a:solidFill>
                   <a:srgbClr val="3B1217"/>
                 </a:solidFill>
@@ -3396,14 +3448,78 @@
       </p:sp>
       <p:sp>
         <p:nvSpPr>
-          <p:cNvPr id="25" name="Text 22"/>
-          <p:cNvSpPr txBox="1"/>
-          <p:nvPr/>
-        </p:nvSpPr>
-        <p:spPr>
-          <a:xfrm>
-            <a:off x="10149840" y="3291840"/>
-            <a:ext cx="1463040" cy="822960"/>
+          <p:cNvPr id="47" name="Text 4"/>
+          <p:cNvSpPr txBox="1"/>
+          <p:nvPr/>
+        </p:nvSpPr>
+        <p:spPr>
+          <a:xfrm>
+            <a:off x="8805672" y="2971800"/>
+            <a:ext cx="1316736" cy="1371600"/>
+          </a:xfrm>
+          <a:prstGeom prst="rect">
+            <a:avLst/>
+          </a:prstGeom>
+          <a:noFill/>
+          <a:ln/>
+        </p:spPr>
+        <p:txBody>
+          <a:bodyPr wrap="square" lIns="0" tIns="0" rIns="0" bIns="0" rtlCol="0" anchor="t"/>
+          <a:lstStyle/>
+          <a:p>
+            <a:pPr algn="ctr" indent="0" marL="0">
+              <a:buNone/>
+            </a:pPr>
+            <a:r>
+              <a:rPr lang="en-US" sz="1600" b="1" dirty="0">
+                <a:solidFill>
+                  <a:srgbClr val="FFFFFF"/>
+                </a:solidFill>
+                <a:latin typeface="Calibri" pitchFamily="34" charset="0"/>
+                <a:ea typeface="Calibri" pitchFamily="34" charset="-122"/>
+                <a:cs typeface="Calibri" pitchFamily="34" charset="-120"/>
+              </a:rPr>
+              <a:t>Quiz</a:t>
+            </a:r>
+            <a:endParaRPr lang="en-US" sz="1600" dirty="0"/>
+          </a:p>
+        </p:txBody>
+      </p:sp>
+      <p:sp>
+        <p:nvSpPr>
+          <p:cNvPr id="48" name="Shape 2"/>
+          <p:cNvSpPr/>
+          <p:nvPr/>
+        </p:nvSpPr>
+        <p:spPr>
+          <a:xfrm>
+            <a:off x="10424160" y="2011680"/>
+            <a:ext cx="822960" cy="822960"/>
+          </a:xfrm>
+          <a:prstGeom prst="ellipse">
+            <a:avLst/>
+          </a:prstGeom>
+          <a:solidFill>
+            <a:srgbClr val="F1BE48"/>
+          </a:solidFill>
+          <a:ln w="12700">
+            <a:solidFill>
+              <a:srgbClr val="F1BE48"/>
+            </a:solidFill>
+            <a:prstDash val="solid"/>
+          </a:ln>
+        </p:spPr>
+      </p:sp>
+      <p:sp>
+        <p:nvSpPr>
+          <p:cNvPr id="49" name="Text 3"/>
+          <p:cNvSpPr txBox="1"/>
+          <p:nvPr/>
+        </p:nvSpPr>
+        <p:spPr>
+          <a:xfrm>
+            <a:off x="10424160" y="2011680"/>
+            <a:ext cx="822960" cy="822960"/>
           </a:xfrm>
           <a:prstGeom prst="rect">
             <a:avLst/>
@@ -3419,54 +3535,93 @@
               <a:buNone/>
             </a:pPr>
             <a:r>
-              <a:rPr lang="en-US" sz="1600" b="1" dirty="0">
-                <a:solidFill>
-                  <a:srgbClr val="FFFFFF"/>
-                </a:solidFill>
-                <a:latin typeface="Calibri" pitchFamily="34" charset="0"/>
-                <a:ea typeface="Calibri" pitchFamily="34" charset="-122"/>
-                <a:cs typeface="Calibri" pitchFamily="34" charset="-120"/>
-              </a:rPr>
-              <a:t>Reflect</a:t>
-            </a:r>
-            <a:endParaRPr lang="en-US" sz="1600" dirty="0"/>
-          </a:p>
-        </p:txBody>
-      </p:sp>
-      <p:sp>
-        <p:nvSpPr>
-          <p:cNvPr id="26" name="Text 23"/>
-          <p:cNvSpPr txBox="1"/>
-          <p:nvPr/>
-        </p:nvSpPr>
-        <p:spPr>
-          <a:xfrm>
-            <a:off x="548640" y="4846320"/>
-            <a:ext cx="10972800" cy="640080"/>
-          </a:xfrm>
-          <a:prstGeom prst="rect">
-            <a:avLst/>
-          </a:prstGeom>
-          <a:noFill/>
-          <a:ln/>
-        </p:spPr>
-        <p:txBody>
-          <a:bodyPr wrap="square" lIns="0" tIns="0" rIns="0" bIns="0" rtlCol="0" anchor="ctr"/>
-          <a:lstStyle/>
-          <a:p>
-            <a:pPr indent="0" marL="0">
-              <a:buNone/>
-            </a:pPr>
-            <a:r>
-              <a:rPr lang="en-US" sz="3000" b="1" dirty="0">
-                <a:solidFill>
-                  <a:srgbClr val="FFFFFF"/>
+              <a:rPr lang="en-US" sz="2800" b="1" dirty="0">
+                <a:solidFill>
+                  <a:srgbClr val="3B1217"/>
                 </a:solidFill>
                 <a:latin typeface="Cambria" pitchFamily="34" charset="0"/>
                 <a:ea typeface="Cambria" pitchFamily="34" charset="-122"/>
                 <a:cs typeface="Cambria" pitchFamily="34" charset="-120"/>
               </a:rPr>
-              <a:t>By Friday: your Prompt Playbook and a note to Walt.</a:t>
+              <a:t>8</a:t>
+            </a:r>
+            <a:endParaRPr lang="en-US" sz="3000" dirty="0"/>
+          </a:p>
+        </p:txBody>
+      </p:sp>
+      <p:sp>
+        <p:nvSpPr>
+          <p:cNvPr id="50" name="Text 4"/>
+          <p:cNvSpPr txBox="1"/>
+          <p:nvPr/>
+        </p:nvSpPr>
+        <p:spPr>
+          <a:xfrm>
+            <a:off x="10177272" y="2971800"/>
+            <a:ext cx="1316736" cy="1371600"/>
+          </a:xfrm>
+          <a:prstGeom prst="rect">
+            <a:avLst/>
+          </a:prstGeom>
+          <a:noFill/>
+          <a:ln/>
+        </p:spPr>
+        <p:txBody>
+          <a:bodyPr wrap="square" lIns="0" tIns="0" rIns="0" bIns="0" rtlCol="0" anchor="t"/>
+          <a:lstStyle/>
+          <a:p>
+            <a:pPr algn="ctr" indent="0" marL="0">
+              <a:buNone/>
+            </a:pPr>
+            <a:r>
+              <a:rPr lang="en-US" sz="1600" b="1" dirty="0">
+                <a:solidFill>
+                  <a:srgbClr val="FFFFFF"/>
+                </a:solidFill>
+                <a:latin typeface="Calibri" pitchFamily="34" charset="0"/>
+                <a:ea typeface="Calibri" pitchFamily="34" charset="-122"/>
+                <a:cs typeface="Calibri" pitchFamily="34" charset="-120"/>
+              </a:rPr>
+              <a:t>Reflection</a:t>
+            </a:r>
+            <a:endParaRPr lang="en-US" sz="1600" dirty="0"/>
+          </a:p>
+        </p:txBody>
+      </p:sp>
+      <p:sp>
+        <p:nvSpPr>
+          <p:cNvPr id="26" name="Text 23"/>
+          <p:cNvSpPr txBox="1"/>
+          <p:nvPr/>
+        </p:nvSpPr>
+        <p:spPr>
+          <a:xfrm>
+            <a:off x="548640" y="4846320"/>
+            <a:ext cx="10972800" cy="640080"/>
+          </a:xfrm>
+          <a:prstGeom prst="rect">
+            <a:avLst/>
+          </a:prstGeom>
+          <a:noFill/>
+          <a:ln/>
+        </p:spPr>
+        <p:txBody>
+          <a:bodyPr wrap="square" lIns="0" tIns="0" rIns="0" bIns="0" rtlCol="0" anchor="ctr"/>
+          <a:lstStyle/>
+          <a:p>
+            <a:pPr indent="0" marL="0">
+              <a:buNone/>
+            </a:pPr>
+            <a:r>
+              <a:rPr lang="en-US" sz="3000" b="1" dirty="0">
+                <a:solidFill>
+                  <a:srgbClr val="FFFFFF"/>
+                </a:solidFill>
+                <a:latin typeface="Cambria" pitchFamily="34" charset="0"/>
+                <a:ea typeface="Cambria" pitchFamily="34" charset="-122"/>
+                <a:cs typeface="Cambria" pitchFamily="34" charset="-120"/>
+              </a:rPr>
+              <a:t>Your goal: your Prompt Playbook and a note to Walt.</a:t>
             </a:r>
             <a:endParaRPr lang="en-US" sz="3000" dirty="0"/>
           </a:p>
@@ -3608,6 +3763,10 @@
             <a:prstDash val="solid"/>
           </a:ln>
         </p:spPr>
+        <p:txBody>
+          <a:bodyPr/>
+          <a:p/>
+        </p:txBody>
       </p:sp>
       <p:sp>
         <p:nvSpPr>
@@ -3633,6 +3792,10 @@
             <a:prstDash val="solid"/>
           </a:ln>
         </p:spPr>
+        <p:txBody>
+          <a:bodyPr/>
+          <a:p/>
+        </p:txBody>
       </p:sp>
       <p:sp>
         <p:nvSpPr>
@@ -3738,6 +3901,10 @@
             <a:prstDash val="solid"/>
           </a:ln>
         </p:spPr>
+        <p:txBody>
+          <a:bodyPr/>
+          <a:p/>
+        </p:txBody>
       </p:sp>
       <p:sp>
         <p:nvSpPr>
@@ -3763,6 +3930,10 @@
             <a:prstDash val="solid"/>
           </a:ln>
         </p:spPr>
+        <p:txBody>
+          <a:bodyPr/>
+          <a:p/>
+        </p:txBody>
       </p:sp>
       <p:sp>
         <p:nvSpPr>
@@ -3868,6 +4039,10 @@
             <a:prstDash val="solid"/>
           </a:ln>
         </p:spPr>
+        <p:txBody>
+          <a:bodyPr/>
+          <a:p/>
+        </p:txBody>
       </p:sp>
       <p:sp>
         <p:nvSpPr>
@@ -3893,6 +4068,10 @@
             <a:prstDash val="solid"/>
           </a:ln>
         </p:spPr>
+        <p:txBody>
+          <a:bodyPr/>
+          <a:p/>
+        </p:txBody>
       </p:sp>
       <p:sp>
         <p:nvSpPr>
@@ -4147,6 +4326,10 @@
             <a:prstDash val="solid"/>
           </a:ln>
         </p:spPr>
+        <p:txBody>
+          <a:bodyPr/>
+          <a:p/>
+        </p:txBody>
       </p:sp>
       <p:sp>
         <p:nvSpPr>
@@ -4172,6 +4355,10 @@
             <a:prstDash val="solid"/>
           </a:ln>
         </p:spPr>
+        <p:txBody>
+          <a:bodyPr/>
+          <a:p/>
+        </p:txBody>
       </p:sp>
       <p:sp>
         <p:nvSpPr>
@@ -4277,6 +4464,10 @@
             <a:prstDash val="solid"/>
           </a:ln>
         </p:spPr>
+        <p:txBody>
+          <a:bodyPr/>
+          <a:p/>
+        </p:txBody>
       </p:sp>
       <p:sp>
         <p:nvSpPr>
@@ -4302,6 +4493,10 @@
             <a:prstDash val="solid"/>
           </a:ln>
         </p:spPr>
+        <p:txBody>
+          <a:bodyPr/>
+          <a:p/>
+        </p:txBody>
       </p:sp>
       <p:sp>
         <p:nvSpPr>
@@ -4556,6 +4751,10 @@
             <a:prstDash val="solid"/>
           </a:ln>
         </p:spPr>
+        <p:txBody>
+          <a:bodyPr/>
+          <a:p/>
+        </p:txBody>
       </p:sp>
       <p:sp>
         <p:nvSpPr>
@@ -4661,6 +4860,10 @@
             <a:prstDash val="solid"/>
           </a:ln>
         </p:spPr>
+        <p:txBody>
+          <a:bodyPr/>
+          <a:p/>
+        </p:txBody>
       </p:sp>
       <p:sp>
         <p:nvSpPr>
@@ -4766,6 +4969,10 @@
             <a:prstDash val="solid"/>
           </a:ln>
         </p:spPr>
+        <p:txBody>
+          <a:bodyPr/>
+          <a:p/>
+        </p:txBody>
       </p:sp>
       <p:sp>
         <p:nvSpPr>
@@ -4871,6 +5078,10 @@
             <a:prstDash val="solid"/>
           </a:ln>
         </p:spPr>
+        <p:txBody>
+          <a:bodyPr/>
+          <a:p/>
+        </p:txBody>
       </p:sp>
       <p:sp>
         <p:nvSpPr>
@@ -4976,6 +5187,10 @@
             <a:prstDash val="solid"/>
           </a:ln>
         </p:spPr>
+        <p:txBody>
+          <a:bodyPr/>
+          <a:p/>
+        </p:txBody>
       </p:sp>
       <p:sp>
         <p:nvSpPr>
@@ -5081,6 +5296,10 @@
             <a:prstDash val="solid"/>
           </a:ln>
         </p:spPr>
+        <p:txBody>
+          <a:bodyPr/>
+          <a:p/>
+        </p:txBody>
       </p:sp>
       <p:sp>
         <p:nvSpPr>
@@ -5302,6 +5521,10 @@
             <a:prstDash val="solid"/>
           </a:ln>
         </p:spPr>
+        <p:txBody>
+          <a:bodyPr/>
+          <a:p/>
+        </p:txBody>
       </p:sp>
       <p:sp>
         <p:nvSpPr>
@@ -5446,6 +5669,10 @@
             <a:prstDash val="solid"/>
           </a:ln>
         </p:spPr>
+        <p:txBody>
+          <a:bodyPr/>
+          <a:p/>
+        </p:txBody>
       </p:sp>
       <p:sp>
         <p:nvSpPr>
@@ -5667,6 +5894,10 @@
             <a:prstDash val="solid"/>
           </a:ln>
         </p:spPr>
+        <p:txBody>
+          <a:bodyPr/>
+          <a:p/>
+        </p:txBody>
       </p:sp>
       <p:sp>
         <p:nvSpPr>
@@ -5692,6 +5923,10 @@
             <a:prstDash val="solid"/>
           </a:ln>
         </p:spPr>
+        <p:txBody>
+          <a:bodyPr/>
+          <a:p/>
+        </p:txBody>
       </p:sp>
       <p:sp>
         <p:nvSpPr>
@@ -5797,6 +6032,10 @@
             <a:prstDash val="solid"/>
           </a:ln>
         </p:spPr>
+        <p:txBody>
+          <a:bodyPr/>
+          <a:p/>
+        </p:txBody>
       </p:sp>
       <p:sp>
         <p:nvSpPr>
@@ -5822,6 +6061,10 @@
             <a:prstDash val="solid"/>
           </a:ln>
         </p:spPr>
+        <p:txBody>
+          <a:bodyPr/>
+          <a:p/>
+        </p:txBody>
       </p:sp>
       <p:sp>
         <p:nvSpPr>
@@ -5927,6 +6170,10 @@
             <a:prstDash val="solid"/>
           </a:ln>
         </p:spPr>
+        <p:txBody>
+          <a:bodyPr/>
+          <a:p/>
+        </p:txBody>
       </p:sp>
       <p:sp>
         <p:nvSpPr>
@@ -6148,6 +6395,10 @@
             <a:prstDash val="solid"/>
           </a:ln>
         </p:spPr>
+        <p:txBody>
+          <a:bodyPr/>
+          <a:p/>
+        </p:txBody>
       </p:sp>
       <p:sp>
         <p:nvSpPr>
@@ -6173,6 +6424,10 @@
             <a:prstDash val="solid"/>
           </a:ln>
         </p:spPr>
+        <p:txBody>
+          <a:bodyPr/>
+          <a:p/>
+        </p:txBody>
       </p:sp>
       <p:sp>
         <p:nvSpPr>
@@ -6278,6 +6533,10 @@
             <a:prstDash val="solid"/>
           </a:ln>
         </p:spPr>
+        <p:txBody>
+          <a:bodyPr/>
+          <a:p/>
+        </p:txBody>
       </p:sp>
       <p:sp>
         <p:nvSpPr>
@@ -6303,6 +6562,10 @@
             <a:prstDash val="solid"/>
           </a:ln>
         </p:spPr>
+        <p:txBody>
+          <a:bodyPr/>
+          <a:p/>
+        </p:txBody>
       </p:sp>
       <p:sp>
         <p:nvSpPr>
@@ -6408,6 +6671,10 @@
             <a:prstDash val="solid"/>
           </a:ln>
         </p:spPr>
+        <p:txBody>
+          <a:bodyPr/>
+          <a:p/>
+        </p:txBody>
       </p:sp>
       <p:sp>
         <p:nvSpPr>
@@ -6629,6 +6896,10 @@
             <a:prstDash val="solid"/>
           </a:ln>
         </p:spPr>
+        <p:txBody>
+          <a:bodyPr/>
+          <a:p/>
+        </p:txBody>
       </p:sp>
       <p:sp>
         <p:nvSpPr>
@@ -6709,6 +6980,10 @@
             <a:prstDash val="solid"/>
           </a:ln>
         </p:spPr>
+        <p:txBody>
+          <a:bodyPr/>
+          <a:p/>
+        </p:txBody>
       </p:sp>
       <p:sp>
         <p:nvSpPr>
@@ -6789,6 +7064,10 @@
             <a:prstDash val="solid"/>
           </a:ln>
         </p:spPr>
+        <p:txBody>
+          <a:bodyPr/>
+          <a:p/>
+        </p:txBody>
       </p:sp>
       <p:sp>
         <p:nvSpPr>
@@ -6869,6 +7148,10 @@
             <a:prstDash val="solid"/>
           </a:ln>
         </p:spPr>
+        <p:txBody>
+          <a:bodyPr/>
+          <a:p/>
+        </p:txBody>
       </p:sp>
       <p:sp>
         <p:nvSpPr>
@@ -6949,6 +7232,10 @@
             <a:prstDash val="solid"/>
           </a:ln>
         </p:spPr>
+        <p:txBody>
+          <a:bodyPr/>
+          <a:p/>
+        </p:txBody>
       </p:sp>
       <p:sp>
         <p:nvSpPr>
@@ -7029,6 +7316,10 @@
             <a:prstDash val="solid"/>
           </a:ln>
         </p:spPr>
+        <p:txBody>
+          <a:bodyPr/>
+          <a:p/>
+        </p:txBody>
       </p:sp>
       <p:sp>
         <p:nvSpPr>
@@ -7109,6 +7400,10 @@
             <a:prstDash val="solid"/>
           </a:ln>
         </p:spPr>
+        <p:txBody>
+          <a:bodyPr/>
+          <a:p/>
+        </p:txBody>
       </p:sp>
       <p:sp>
         <p:nvSpPr>
@@ -7189,6 +7484,10 @@
             <a:prstDash val="solid"/>
           </a:ln>
         </p:spPr>
+        <p:txBody>
+          <a:bodyPr/>
+          <a:p/>
+        </p:txBody>
       </p:sp>
       <p:sp>
         <p:nvSpPr>
@@ -7418,6 +7717,10 @@
             <a:prstDash val="solid"/>
           </a:ln>
         </p:spPr>
+        <p:txBody>
+          <a:bodyPr/>
+          <a:p/>
+        </p:txBody>
       </p:sp>
       <p:sp>
         <p:nvSpPr>
@@ -7443,6 +7746,10 @@
             <a:prstDash val="solid"/>
           </a:ln>
         </p:spPr>
+        <p:txBody>
+          <a:bodyPr/>
+          <a:p/>
+        </p:txBody>
       </p:sp>
       <p:sp>
         <p:nvSpPr>
@@ -7594,6 +7901,10 @@
             <a:prstDash val="solid"/>
           </a:ln>
         </p:spPr>
+        <p:txBody>
+          <a:bodyPr/>
+          <a:p/>
+        </p:txBody>
       </p:sp>
       <p:sp>
         <p:nvSpPr>
@@ -7619,6 +7930,10 @@
             <a:prstDash val="solid"/>
           </a:ln>
         </p:spPr>
+        <p:txBody>
+          <a:bodyPr/>
+          <a:p/>
+        </p:txBody>
       </p:sp>
       <p:sp>
         <p:nvSpPr>
